--- a/每天一个Skill-分享PPT.pptx
+++ b/每天一个Skill-分享PPT.pptx
@@ -5506,7 +5506,7 @@
                 <a:ea typeface="Arial" pitchFamily="34" charset="-122"/>
                 <a:cs typeface="Arial" pitchFamily="34" charset="-120"/>
               </a:rPr>
-              <a:t>安装派</a:t>
+              <a:t>实战派</a:t>
             </a:r>
             <a:endParaRPr lang="en-US" sz="1800" dirty="0"/>
           </a:p>
@@ -5545,7 +5545,7 @@
                 <a:ea typeface="Arial" pitchFamily="34" charset="-122"/>
                 <a:cs typeface="Arial" pitchFamily="34" charset="-120"/>
               </a:rPr>
-              <a:t>运行：</a:t>
+              <a:t>用 AI 工具</a:t>
             </a:r>
             <a:endParaRPr lang="en-US" sz="1100" dirty="0"/>
           </a:p>
@@ -5562,7 +5562,7 @@
                 <a:ea typeface="Arial" pitchFamily="34" charset="-122"/>
                 <a:cs typeface="Arial" pitchFamily="34" charset="-120"/>
               </a:rPr>
-              <a:t>clawhub install weather</a:t>
+              <a:t>SSH 到服务器</a:t>
             </a:r>
             <a:endParaRPr lang="en-US" sz="1100" dirty="0"/>
           </a:p>
@@ -5570,12 +5570,6 @@
             <a:pPr algn="ctr" indent="0" marL="0">
               <a:buNone/>
             </a:pPr>
-            <a:endParaRPr lang="en-US" sz="1100" dirty="0"/>
-          </a:p>
-          <a:p>
-            <a:pPr algn="ctr" indent="0" marL="0">
-              <a:buNone/>
-            </a:pPr>
             <a:r>
               <a:rPr lang="en-US" sz="1100" dirty="0">
                 <a:solidFill>
@@ -5585,7 +5579,7 @@
                 <a:ea typeface="Arial" pitchFamily="34" charset="-122"/>
                 <a:cs typeface="Arial" pitchFamily="34" charset="-120"/>
               </a:rPr>
-              <a:t>然后试试效果</a:t>
+              <a:t>改造龙虾目录</a:t>
             </a:r>
             <a:endParaRPr lang="en-US" sz="1100" dirty="0"/>
           </a:p>

--- a/每天一个Skill-分享PPT.pptx
+++ b/每天一个Skill-分享PPT.pptx
@@ -1966,7 +1966,7 @@
               <a:buNone/>
             </a:pPr>
             <a:r>
-              <a:rPr lang="en-US" sz="1400" b="1" dirty="0">
+              <a:rPr lang="en-US" sz="1400" dirty="0">
                 <a:solidFill>
                   <a:srgbClr val="2D3748"/>
                 </a:solidFill>
@@ -2176,8 +2176,8 @@
         </p:nvSpPr>
         <p:spPr>
           <a:xfrm>
-            <a:off x="457200" y="274320"/>
-            <a:ext cx="8229600" cy="731520"/>
+            <a:off x="457200" y="182880"/>
+            <a:ext cx="8229600" cy="640080"/>
           </a:xfrm>
           <a:prstGeom prst="rect">
             <a:avLst/>
@@ -2215,8 +2215,8 @@
         </p:nvSpPr>
         <p:spPr>
           <a:xfrm>
-            <a:off x="457200" y="1097280"/>
-            <a:ext cx="3931920" cy="3657600"/>
+            <a:off x="365760" y="822960"/>
+            <a:ext cx="2697480" cy="3977640"/>
           </a:xfrm>
           <a:prstGeom prst="rect">
             <a:avLst/>
@@ -2226,7 +2226,7 @@
           </a:solidFill>
           <a:ln/>
           <a:effectLst>
-            <a:outerShdw sx="100000" sy="100000" kx="0" ky="0" algn="bl" rotWithShape="0" blurRad="101600" dist="25400" dir="8100000">
+            <a:outerShdw sx="100000" sy="100000" kx="0" ky="0" algn="bl" rotWithShape="0" blurRad="76200" dist="25400" dir="8100000">
               <a:srgbClr val="000000">
                 <a:alpha val="10000"/>
               </a:srgbClr>
@@ -2236,14 +2236,34 @@
       </p:sp>
       <p:sp>
         <p:nvSpPr>
-          <p:cNvPr id="4" name="Text 2"/>
-          <p:cNvSpPr/>
-          <p:nvPr/>
-        </p:nvSpPr>
-        <p:spPr>
-          <a:xfrm>
-            <a:off x="640080" y="1280160"/>
-            <a:ext cx="3657600" cy="457200"/>
+          <p:cNvPr id="4" name="Shape 2"/>
+          <p:cNvSpPr/>
+          <p:nvPr/>
+        </p:nvSpPr>
+        <p:spPr>
+          <a:xfrm>
+            <a:off x="365760" y="822960"/>
+            <a:ext cx="2697480" cy="411480"/>
+          </a:xfrm>
+          <a:prstGeom prst="rect">
+            <a:avLst/>
+          </a:prstGeom>
+          <a:solidFill>
+            <a:srgbClr val="1C7293"/>
+          </a:solidFill>
+          <a:ln/>
+        </p:spPr>
+      </p:sp>
+      <p:sp>
+        <p:nvSpPr>
+          <p:cNvPr id="5" name="Text 3"/>
+          <p:cNvSpPr/>
+          <p:nvPr/>
+        </p:nvSpPr>
+        <p:spPr>
+          <a:xfrm>
+            <a:off x="365760" y="868680"/>
+            <a:ext cx="2697480" cy="320040"/>
           </a:xfrm>
           <a:prstGeom prst="rect">
             <a:avLst/>
@@ -2255,34 +2275,34 @@
           <a:bodyPr wrap="square" rtlCol="0" anchor="ctr"/>
           <a:lstStyle/>
           <a:p>
-            <a:pPr indent="0" marL="0">
-              <a:buNone/>
-            </a:pPr>
-            <a:r>
-              <a:rPr lang="en-US" sz="1800" b="1" dirty="0">
-                <a:solidFill>
-                  <a:srgbClr val="1C7293"/>
-                </a:solidFill>
-                <a:latin typeface="Arial" pitchFamily="34" charset="0"/>
-                <a:ea typeface="Arial" pitchFamily="34" charset="-122"/>
-                <a:cs typeface="Arial" pitchFamily="34" charset="-120"/>
-              </a:rPr>
-              <a:t>👔 打工人痛点</a:t>
-            </a:r>
-            <a:endParaRPr lang="en-US" sz="1800" dirty="0"/>
-          </a:p>
-        </p:txBody>
-      </p:sp>
-      <p:sp>
-        <p:nvSpPr>
-          <p:cNvPr id="5" name="Text 3"/>
-          <p:cNvSpPr/>
-          <p:nvPr/>
-        </p:nvSpPr>
-        <p:spPr>
-          <a:xfrm>
-            <a:off x="640080" y="1828800"/>
-            <a:ext cx="3657600" cy="2743200"/>
+            <a:pPr algn="ctr" indent="0" marL="0">
+              <a:buNone/>
+            </a:pPr>
+            <a:r>
+              <a:rPr lang="en-US" sz="1500" b="1" dirty="0">
+                <a:solidFill>
+                  <a:srgbClr val="FFFFFF"/>
+                </a:solidFill>
+                <a:latin typeface="Arial" pitchFamily="34" charset="0"/>
+                <a:ea typeface="Arial" pitchFamily="34" charset="-122"/>
+                <a:cs typeface="Arial" pitchFamily="34" charset="-120"/>
+              </a:rPr>
+              <a:t>👔 打工人</a:t>
+            </a:r>
+            <a:endParaRPr lang="en-US" sz="1500" dirty="0"/>
+          </a:p>
+        </p:txBody>
+      </p:sp>
+      <p:sp>
+        <p:nvSpPr>
+          <p:cNvPr id="6" name="Text 4"/>
+          <p:cNvSpPr/>
+          <p:nvPr/>
+        </p:nvSpPr>
+        <p:spPr>
+          <a:xfrm>
+            <a:off x="457200" y="1325880"/>
+            <a:ext cx="2514600" cy="3291840"/>
           </a:xfrm>
           <a:prstGeom prst="rect">
             <a:avLst/>
@@ -2298,7 +2318,7 @@
               <a:buNone/>
             </a:pPr>
             <a:r>
-              <a:rPr lang="en-US" sz="1200" b="1" dirty="0">
+              <a:rPr lang="en-US" sz="900" b="1" dirty="0">
                 <a:solidFill>
                   <a:srgbClr val="2D3748"/>
                 </a:solidFill>
@@ -2306,16 +2326,16 @@
                 <a:ea typeface="Arial" pitchFamily="34" charset="-122"/>
                 <a:cs typeface="Arial" pitchFamily="34" charset="-120"/>
               </a:rPr>
-              <a:t>写周报</a:t>
-            </a:r>
-            <a:endParaRPr lang="en-US" sz="1200" dirty="0"/>
-          </a:p>
-          <a:p>
-            <a:pPr indent="0" marL="0">
-              <a:buNone/>
-            </a:pPr>
-            <a:r>
-              <a:rPr lang="en-US" sz="1200" dirty="0">
+              <a:t>📊 项目汇报</a:t>
+            </a:r>
+            <a:endParaRPr lang="en-US" sz="900" dirty="0"/>
+          </a:p>
+          <a:p>
+            <a:pPr indent="0" marL="0">
+              <a:buNone/>
+            </a:pPr>
+            <a:r>
+              <a:rPr lang="en-US" sz="900" dirty="0">
                 <a:solidFill>
                   <a:srgbClr val="2D3748"/>
                 </a:solidFill>
@@ -2323,22 +2343,16 @@
                 <a:ea typeface="Arial" pitchFamily="34" charset="-122"/>
                 <a:cs typeface="Arial" pitchFamily="34" charset="-120"/>
               </a:rPr>
-              <a:t>每次重新描述格式 → 自动按模板生成</a:t>
-            </a:r>
-            <a:endParaRPr lang="en-US" sz="1200" dirty="0"/>
-          </a:p>
-          <a:p>
-            <a:pPr indent="0" marL="0">
-              <a:buNone/>
-            </a:pPr>
-            <a:endParaRPr lang="en-US" sz="1200" dirty="0"/>
-          </a:p>
-          <a:p>
-            <a:pPr indent="0" marL="0">
-              <a:buNone/>
-            </a:pPr>
-            <a:r>
-              <a:rPr lang="en-US" sz="1200" b="1" dirty="0">
+              <a:t>手动写 → 自动分析生成</a:t>
+            </a:r>
+            <a:endParaRPr lang="en-US" sz="900" dirty="0"/>
+          </a:p>
+          <a:p>
+            <a:pPr indent="0" marL="0">
+              <a:buNone/>
+            </a:pPr>
+            <a:r>
+              <a:rPr lang="en-US" sz="900" dirty="0">
                 <a:solidFill>
                   <a:srgbClr val="2D3748"/>
                 </a:solidFill>
@@ -2346,16 +2360,36 @@
                 <a:ea typeface="Arial" pitchFamily="34" charset="-122"/>
                 <a:cs typeface="Arial" pitchFamily="34" charset="-120"/>
               </a:rPr>
-              <a:t>查数据</a:t>
-            </a:r>
-            <a:endParaRPr lang="en-US" sz="1200" dirty="0"/>
-          </a:p>
-          <a:p>
-            <a:pPr indent="0" marL="0">
-              <a:buNone/>
-            </a:pPr>
-            <a:r>
-              <a:rPr lang="en-US" sz="1200" dirty="0">
+              <a:t>Skill: </a:t>
+            </a:r>
+            <a:pPr indent="0" marL="0">
+              <a:buNone/>
+            </a:pPr>
+            <a:r>
+              <a:rPr lang="en-US" sz="900" b="1" dirty="0">
+                <a:solidFill>
+                  <a:srgbClr val="FF5A36"/>
+                </a:solidFill>
+                <a:latin typeface="Arial" pitchFamily="34" charset="0"/>
+                <a:ea typeface="Arial" pitchFamily="34" charset="-122"/>
+                <a:cs typeface="Arial" pitchFamily="34" charset="-120"/>
+              </a:rPr>
+              <a:t>GitHub + PPT</a:t>
+            </a:r>
+            <a:endParaRPr lang="en-US" sz="900" dirty="0"/>
+          </a:p>
+          <a:p>
+            <a:pPr indent="0" marL="0">
+              <a:buNone/>
+            </a:pPr>
+            <a:endParaRPr lang="en-US" sz="900" dirty="0"/>
+          </a:p>
+          <a:p>
+            <a:pPr indent="0" marL="0">
+              <a:buNone/>
+            </a:pPr>
+            <a:r>
+              <a:rPr lang="en-US" sz="900" b="1" dirty="0">
                 <a:solidFill>
                   <a:srgbClr val="2D3748"/>
                 </a:solidFill>
@@ -2363,22 +2397,16 @@
                 <a:ea typeface="Arial" pitchFamily="34" charset="-122"/>
                 <a:cs typeface="Arial" pitchFamily="34" charset="-120"/>
               </a:rPr>
-              <a:t>手动复制粘贴 → 一句话自动汇总</a:t>
-            </a:r>
-            <a:endParaRPr lang="en-US" sz="1200" dirty="0"/>
-          </a:p>
-          <a:p>
-            <a:pPr indent="0" marL="0">
-              <a:buNone/>
-            </a:pPr>
-            <a:endParaRPr lang="en-US" sz="1200" dirty="0"/>
-          </a:p>
-          <a:p>
-            <a:pPr indent="0" marL="0">
-              <a:buNone/>
-            </a:pPr>
-            <a:r>
-              <a:rPr lang="en-US" sz="1200" b="1" dirty="0">
+              <a:t>📝 周报撰写</a:t>
+            </a:r>
+            <a:endParaRPr lang="en-US" sz="900" dirty="0"/>
+          </a:p>
+          <a:p>
+            <a:pPr indent="0" marL="0">
+              <a:buNone/>
+            </a:pPr>
+            <a:r>
+              <a:rPr lang="en-US" sz="900" dirty="0">
                 <a:solidFill>
                   <a:srgbClr val="2D3748"/>
                 </a:solidFill>
@@ -2386,16 +2414,16 @@
                 <a:ea typeface="Arial" pitchFamily="34" charset="-122"/>
                 <a:cs typeface="Arial" pitchFamily="34" charset="-120"/>
               </a:rPr>
-              <a:t>写邮件</a:t>
-            </a:r>
-            <a:endParaRPr lang="en-US" sz="1200" dirty="0"/>
-          </a:p>
-          <a:p>
-            <a:pPr indent="0" marL="0">
-              <a:buNone/>
-            </a:pPr>
-            <a:r>
-              <a:rPr lang="en-US" sz="1200" dirty="0">
+              <a:t>每次重新描述 → 模板自动生成</a:t>
+            </a:r>
+            <a:endParaRPr lang="en-US" sz="900" dirty="0"/>
+          </a:p>
+          <a:p>
+            <a:pPr indent="0" marL="0">
+              <a:buNone/>
+            </a:pPr>
+            <a:r>
+              <a:rPr lang="en-US" sz="900" dirty="0">
                 <a:solidFill>
                   <a:srgbClr val="2D3748"/>
                 </a:solidFill>
@@ -2403,22 +2431,107 @@
                 <a:ea typeface="Arial" pitchFamily="34" charset="-122"/>
                 <a:cs typeface="Arial" pitchFamily="34" charset="-120"/>
               </a:rPr>
-              <a:t>每次现想 → 按公司风格生成</a:t>
-            </a:r>
-            <a:endParaRPr lang="en-US" sz="1200" dirty="0"/>
-          </a:p>
-        </p:txBody>
-      </p:sp>
-      <p:sp>
-        <p:nvSpPr>
-          <p:cNvPr id="6" name="Shape 4"/>
-          <p:cNvSpPr/>
-          <p:nvPr/>
-        </p:nvSpPr>
-        <p:spPr>
-          <a:xfrm>
-            <a:off x="4754880" y="1097280"/>
-            <a:ext cx="3931920" cy="3657600"/>
+              <a:t>Skill: </a:t>
+            </a:r>
+            <a:pPr indent="0" marL="0">
+              <a:buNone/>
+            </a:pPr>
+            <a:r>
+              <a:rPr lang="en-US" sz="900" b="1" dirty="0">
+                <a:solidFill>
+                  <a:srgbClr val="FF5A36"/>
+                </a:solidFill>
+                <a:latin typeface="Arial" pitchFamily="34" charset="0"/>
+                <a:ea typeface="Arial" pitchFamily="34" charset="-122"/>
+                <a:cs typeface="Arial" pitchFamily="34" charset="-120"/>
+              </a:rPr>
+              <a:t>Notion/Obsidian</a:t>
+            </a:r>
+            <a:endParaRPr lang="en-US" sz="900" dirty="0"/>
+          </a:p>
+          <a:p>
+            <a:pPr indent="0" marL="0">
+              <a:buNone/>
+            </a:pPr>
+            <a:endParaRPr lang="en-US" sz="900" dirty="0"/>
+          </a:p>
+          <a:p>
+            <a:pPr indent="0" marL="0">
+              <a:buNone/>
+            </a:pPr>
+            <a:r>
+              <a:rPr lang="en-US" sz="900" b="1" dirty="0">
+                <a:solidFill>
+                  <a:srgbClr val="2D3748"/>
+                </a:solidFill>
+                <a:latin typeface="Arial" pitchFamily="34" charset="0"/>
+                <a:ea typeface="Arial" pitchFamily="34" charset="-122"/>
+                <a:cs typeface="Arial" pitchFamily="34" charset="-120"/>
+              </a:rPr>
+              <a:t>📧 邮件回复</a:t>
+            </a:r>
+            <a:endParaRPr lang="en-US" sz="900" dirty="0"/>
+          </a:p>
+          <a:p>
+            <a:pPr indent="0" marL="0">
+              <a:buNone/>
+            </a:pPr>
+            <a:r>
+              <a:rPr lang="en-US" sz="900" dirty="0">
+                <a:solidFill>
+                  <a:srgbClr val="2D3748"/>
+                </a:solidFill>
+                <a:latin typeface="Arial" pitchFamily="34" charset="0"/>
+                <a:ea typeface="Arial" pitchFamily="34" charset="-122"/>
+                <a:cs typeface="Arial" pitchFamily="34" charset="-120"/>
+              </a:rPr>
+              <a:t>每次现想 → 按风格生成</a:t>
+            </a:r>
+            <a:endParaRPr lang="en-US" sz="900" dirty="0"/>
+          </a:p>
+          <a:p>
+            <a:pPr indent="0" marL="0">
+              <a:buNone/>
+            </a:pPr>
+            <a:r>
+              <a:rPr lang="en-US" sz="900" dirty="0">
+                <a:solidFill>
+                  <a:srgbClr val="2D3748"/>
+                </a:solidFill>
+                <a:latin typeface="Arial" pitchFamily="34" charset="0"/>
+                <a:ea typeface="Arial" pitchFamily="34" charset="-122"/>
+                <a:cs typeface="Arial" pitchFamily="34" charset="-120"/>
+              </a:rPr>
+              <a:t>Skill: </a:t>
+            </a:r>
+            <a:pPr indent="0" marL="0">
+              <a:buNone/>
+            </a:pPr>
+            <a:r>
+              <a:rPr lang="en-US" sz="900" b="1" dirty="0">
+                <a:solidFill>
+                  <a:srgbClr val="FF5A36"/>
+                </a:solidFill>
+                <a:latin typeface="Arial" pitchFamily="34" charset="0"/>
+                <a:ea typeface="Arial" pitchFamily="34" charset="-122"/>
+                <a:cs typeface="Arial" pitchFamily="34" charset="-120"/>
+              </a:rPr>
+              <a:t>邮件 Skill</a:t>
+            </a:r>
+            <a:endParaRPr lang="en-US" sz="900" dirty="0"/>
+          </a:p>
+        </p:txBody>
+      </p:sp>
+      <p:sp>
+        <p:nvSpPr>
+          <p:cNvPr id="7" name="Shape 5"/>
+          <p:cNvSpPr/>
+          <p:nvPr/>
+        </p:nvSpPr>
+        <p:spPr>
+          <a:xfrm>
+            <a:off x="3223260" y="822960"/>
+            <a:ext cx="2697480" cy="3977640"/>
           </a:xfrm>
           <a:prstGeom prst="rect">
             <a:avLst/>
@@ -2428,7 +2541,7 @@
           </a:solidFill>
           <a:ln/>
           <a:effectLst>
-            <a:outerShdw sx="100000" sy="100000" kx="0" ky="0" algn="bl" rotWithShape="0" blurRad="101600" dist="25400" dir="8100000">
+            <a:outerShdw sx="100000" sy="100000" kx="0" ky="0" algn="bl" rotWithShape="0" blurRad="76200" dist="25400" dir="8100000">
               <a:srgbClr val="000000">
                 <a:alpha val="10000"/>
               </a:srgbClr>
@@ -2438,14 +2551,34 @@
       </p:sp>
       <p:sp>
         <p:nvSpPr>
-          <p:cNvPr id="7" name="Text 5"/>
-          <p:cNvSpPr/>
-          <p:nvPr/>
-        </p:nvSpPr>
-        <p:spPr>
-          <a:xfrm>
-            <a:off x="4937760" y="1280160"/>
-            <a:ext cx="3657600" cy="457200"/>
+          <p:cNvPr id="8" name="Shape 6"/>
+          <p:cNvSpPr/>
+          <p:nvPr/>
+        </p:nvSpPr>
+        <p:spPr>
+          <a:xfrm>
+            <a:off x="3223260" y="822960"/>
+            <a:ext cx="2697480" cy="411480"/>
+          </a:xfrm>
+          <a:prstGeom prst="rect">
+            <a:avLst/>
+          </a:prstGeom>
+          <a:solidFill>
+            <a:srgbClr val="065A82"/>
+          </a:solidFill>
+          <a:ln/>
+        </p:spPr>
+      </p:sp>
+      <p:sp>
+        <p:nvSpPr>
+          <p:cNvPr id="9" name="Text 7"/>
+          <p:cNvSpPr/>
+          <p:nvPr/>
+        </p:nvSpPr>
+        <p:spPr>
+          <a:xfrm>
+            <a:off x="3223260" y="868680"/>
+            <a:ext cx="2697480" cy="320040"/>
           </a:xfrm>
           <a:prstGeom prst="rect">
             <a:avLst/>
@@ -2457,11 +2590,98 @@
           <a:bodyPr wrap="square" rtlCol="0" anchor="ctr"/>
           <a:lstStyle/>
           <a:p>
-            <a:pPr indent="0" marL="0">
-              <a:buNone/>
-            </a:pPr>
-            <a:r>
-              <a:rPr lang="en-US" sz="1800" b="1" dirty="0">
+            <a:pPr algn="ctr" indent="0" marL="0">
+              <a:buNone/>
+            </a:pPr>
+            <a:r>
+              <a:rPr lang="en-US" sz="1500" b="1" dirty="0">
+                <a:solidFill>
+                  <a:srgbClr val="FFFFFF"/>
+                </a:solidFill>
+                <a:latin typeface="Arial" pitchFamily="34" charset="0"/>
+                <a:ea typeface="Arial" pitchFamily="34" charset="-122"/>
+                <a:cs typeface="Arial" pitchFamily="34" charset="-120"/>
+              </a:rPr>
+              <a:t>🚀 创业老板</a:t>
+            </a:r>
+            <a:endParaRPr lang="en-US" sz="1500" dirty="0"/>
+          </a:p>
+        </p:txBody>
+      </p:sp>
+      <p:sp>
+        <p:nvSpPr>
+          <p:cNvPr id="10" name="Text 8"/>
+          <p:cNvSpPr/>
+          <p:nvPr/>
+        </p:nvSpPr>
+        <p:spPr>
+          <a:xfrm>
+            <a:off x="3314700" y="1325880"/>
+            <a:ext cx="2514600" cy="3291840"/>
+          </a:xfrm>
+          <a:prstGeom prst="rect">
+            <a:avLst/>
+          </a:prstGeom>
+          <a:noFill/>
+          <a:ln/>
+        </p:spPr>
+        <p:txBody>
+          <a:bodyPr wrap="square" rtlCol="0" anchor="t"/>
+          <a:lstStyle/>
+          <a:p>
+            <a:pPr indent="0" marL="0">
+              <a:buNone/>
+            </a:pPr>
+            <a:r>
+              <a:rPr lang="en-US" sz="900" b="1" dirty="0">
+                <a:solidFill>
+                  <a:srgbClr val="2D3748"/>
+                </a:solidFill>
+                <a:latin typeface="Arial" pitchFamily="34" charset="0"/>
+                <a:ea typeface="Arial" pitchFamily="34" charset="-122"/>
+                <a:cs typeface="Arial" pitchFamily="34" charset="-120"/>
+              </a:rPr>
+              <a:t>👥 团队管理</a:t>
+            </a:r>
+            <a:endParaRPr lang="en-US" sz="900" dirty="0"/>
+          </a:p>
+          <a:p>
+            <a:pPr indent="0" marL="0">
+              <a:buNone/>
+            </a:pPr>
+            <a:r>
+              <a:rPr lang="en-US" sz="900" dirty="0">
+                <a:solidFill>
+                  <a:srgbClr val="2D3748"/>
+                </a:solidFill>
+                <a:latin typeface="Arial" pitchFamily="34" charset="0"/>
+                <a:ea typeface="Arial" pitchFamily="34" charset="-122"/>
+                <a:cs typeface="Arial" pitchFamily="34" charset="-120"/>
+              </a:rPr>
+              <a:t>手动催进度 → 自动汇总状态</a:t>
+            </a:r>
+            <a:endParaRPr lang="en-US" sz="900" dirty="0"/>
+          </a:p>
+          <a:p>
+            <a:pPr indent="0" marL="0">
+              <a:buNone/>
+            </a:pPr>
+            <a:r>
+              <a:rPr lang="en-US" sz="900" dirty="0">
+                <a:solidFill>
+                  <a:srgbClr val="2D3748"/>
+                </a:solidFill>
+                <a:latin typeface="Arial" pitchFamily="34" charset="0"/>
+                <a:ea typeface="Arial" pitchFamily="34" charset="-122"/>
+                <a:cs typeface="Arial" pitchFamily="34" charset="-120"/>
+              </a:rPr>
+              <a:t>Skill: </a:t>
+            </a:r>
+            <a:pPr indent="0" marL="0">
+              <a:buNone/>
+            </a:pPr>
+            <a:r>
+              <a:rPr lang="en-US" sz="900" b="1" dirty="0">
                 <a:solidFill>
                   <a:srgbClr val="FF5A36"/>
                 </a:solidFill>
@@ -2469,22 +2689,250 @@
                 <a:ea typeface="Arial" pitchFamily="34" charset="-122"/>
                 <a:cs typeface="Arial" pitchFamily="34" charset="-120"/>
               </a:rPr>
-              <a:t>🚀 创业者痛点</a:t>
-            </a:r>
-            <a:endParaRPr lang="en-US" sz="1800" dirty="0"/>
-          </a:p>
-        </p:txBody>
-      </p:sp>
-      <p:sp>
-        <p:nvSpPr>
-          <p:cNvPr id="8" name="Text 6"/>
-          <p:cNvSpPr/>
-          <p:nvPr/>
-        </p:nvSpPr>
-        <p:spPr>
-          <a:xfrm>
-            <a:off x="4937760" y="1828800"/>
-            <a:ext cx="3657600" cy="2743200"/>
+              <a:t>Slack + Trello</a:t>
+            </a:r>
+            <a:endParaRPr lang="en-US" sz="900" dirty="0"/>
+          </a:p>
+          <a:p>
+            <a:pPr indent="0" marL="0">
+              <a:buNone/>
+            </a:pPr>
+            <a:endParaRPr lang="en-US" sz="900" dirty="0"/>
+          </a:p>
+          <a:p>
+            <a:pPr indent="0" marL="0">
+              <a:buNone/>
+            </a:pPr>
+            <a:r>
+              <a:rPr lang="en-US" sz="900" b="1" dirty="0">
+                <a:solidFill>
+                  <a:srgbClr val="2D3748"/>
+                </a:solidFill>
+                <a:latin typeface="Arial" pitchFamily="34" charset="0"/>
+                <a:ea typeface="Arial" pitchFamily="34" charset="-122"/>
+                <a:cs typeface="Arial" pitchFamily="34" charset="-120"/>
+              </a:rPr>
+              <a:t>📈 数据分析</a:t>
+            </a:r>
+            <a:endParaRPr lang="en-US" sz="900" dirty="0"/>
+          </a:p>
+          <a:p>
+            <a:pPr indent="0" marL="0">
+              <a:buNone/>
+            </a:pPr>
+            <a:r>
+              <a:rPr lang="en-US" sz="900" dirty="0">
+                <a:solidFill>
+                  <a:srgbClr val="2D3748"/>
+                </a:solidFill>
+                <a:latin typeface="Arial" pitchFamily="34" charset="0"/>
+                <a:ea typeface="Arial" pitchFamily="34" charset="-122"/>
+                <a:cs typeface="Arial" pitchFamily="34" charset="-120"/>
+              </a:rPr>
+              <a:t>每周手动 → 自动生成报表</a:t>
+            </a:r>
+            <a:endParaRPr lang="en-US" sz="900" dirty="0"/>
+          </a:p>
+          <a:p>
+            <a:pPr indent="0" marL="0">
+              <a:buNone/>
+            </a:pPr>
+            <a:r>
+              <a:rPr lang="en-US" sz="900" dirty="0">
+                <a:solidFill>
+                  <a:srgbClr val="2D3748"/>
+                </a:solidFill>
+                <a:latin typeface="Arial" pitchFamily="34" charset="0"/>
+                <a:ea typeface="Arial" pitchFamily="34" charset="-122"/>
+                <a:cs typeface="Arial" pitchFamily="34" charset="-120"/>
+              </a:rPr>
+              <a:t>Skill: </a:t>
+            </a:r>
+            <a:pPr indent="0" marL="0">
+              <a:buNone/>
+            </a:pPr>
+            <a:r>
+              <a:rPr lang="en-US" sz="900" b="1" dirty="0">
+                <a:solidFill>
+                  <a:srgbClr val="FF5A36"/>
+                </a:solidFill>
+                <a:latin typeface="Arial" pitchFamily="34" charset="0"/>
+                <a:ea typeface="Arial" pitchFamily="34" charset="-122"/>
+                <a:cs typeface="Arial" pitchFamily="34" charset="-120"/>
+              </a:rPr>
+              <a:t>飞书/Bitable</a:t>
+            </a:r>
+            <a:endParaRPr lang="en-US" sz="900" dirty="0"/>
+          </a:p>
+          <a:p>
+            <a:pPr indent="0" marL="0">
+              <a:buNone/>
+            </a:pPr>
+            <a:endParaRPr lang="en-US" sz="900" dirty="0"/>
+          </a:p>
+          <a:p>
+            <a:pPr indent="0" marL="0">
+              <a:buNone/>
+            </a:pPr>
+            <a:r>
+              <a:rPr lang="en-US" sz="900" b="1" dirty="0">
+                <a:solidFill>
+                  <a:srgbClr val="2D3748"/>
+                </a:solidFill>
+                <a:latin typeface="Arial" pitchFamily="34" charset="0"/>
+                <a:ea typeface="Arial" pitchFamily="34" charset="-122"/>
+                <a:cs typeface="Arial" pitchFamily="34" charset="-120"/>
+              </a:rPr>
+              <a:t>💰 财务对账</a:t>
+            </a:r>
+            <a:endParaRPr lang="en-US" sz="900" dirty="0"/>
+          </a:p>
+          <a:p>
+            <a:pPr indent="0" marL="0">
+              <a:buNone/>
+            </a:pPr>
+            <a:r>
+              <a:rPr lang="en-US" sz="900" dirty="0">
+                <a:solidFill>
+                  <a:srgbClr val="2D3748"/>
+                </a:solidFill>
+                <a:latin typeface="Arial" pitchFamily="34" charset="0"/>
+                <a:ea typeface="Arial" pitchFamily="34" charset="-122"/>
+                <a:cs typeface="Arial" pitchFamily="34" charset="-120"/>
+              </a:rPr>
+              <a:t>逐笔核对 → 自动匹配账单</a:t>
+            </a:r>
+            <a:endParaRPr lang="en-US" sz="900" dirty="0"/>
+          </a:p>
+          <a:p>
+            <a:pPr indent="0" marL="0">
+              <a:buNone/>
+            </a:pPr>
+            <a:r>
+              <a:rPr lang="en-US" sz="900" dirty="0">
+                <a:solidFill>
+                  <a:srgbClr val="2D3748"/>
+                </a:solidFill>
+                <a:latin typeface="Arial" pitchFamily="34" charset="0"/>
+                <a:ea typeface="Arial" pitchFamily="34" charset="-122"/>
+                <a:cs typeface="Arial" pitchFamily="34" charset="-120"/>
+              </a:rPr>
+              <a:t>Skill: </a:t>
+            </a:r>
+            <a:pPr indent="0" marL="0">
+              <a:buNone/>
+            </a:pPr>
+            <a:r>
+              <a:rPr lang="en-US" sz="900" b="1" dirty="0">
+                <a:solidFill>
+                  <a:srgbClr val="FF5A36"/>
+                </a:solidFill>
+                <a:latin typeface="Arial" pitchFamily="34" charset="0"/>
+                <a:ea typeface="Arial" pitchFamily="34" charset="-122"/>
+                <a:cs typeface="Arial" pitchFamily="34" charset="-120"/>
+              </a:rPr>
+              <a:t>文档处理 Skill</a:t>
+            </a:r>
+            <a:endParaRPr lang="en-US" sz="900" dirty="0"/>
+          </a:p>
+        </p:txBody>
+      </p:sp>
+      <p:sp>
+        <p:nvSpPr>
+          <p:cNvPr id="11" name="Shape 9"/>
+          <p:cNvSpPr/>
+          <p:nvPr/>
+        </p:nvSpPr>
+        <p:spPr>
+          <a:xfrm>
+            <a:off x="6080760" y="822960"/>
+            <a:ext cx="2697480" cy="3977640"/>
+          </a:xfrm>
+          <a:prstGeom prst="rect">
+            <a:avLst/>
+          </a:prstGeom>
+          <a:solidFill>
+            <a:srgbClr val="FFFFFF"/>
+          </a:solidFill>
+          <a:ln/>
+          <a:effectLst>
+            <a:outerShdw sx="100000" sy="100000" kx="0" ky="0" algn="bl" rotWithShape="0" blurRad="76200" dist="25400" dir="8100000">
+              <a:srgbClr val="000000">
+                <a:alpha val="10000"/>
+              </a:srgbClr>
+            </a:outerShdw>
+          </a:effectLst>
+        </p:spPr>
+      </p:sp>
+      <p:sp>
+        <p:nvSpPr>
+          <p:cNvPr id="12" name="Shape 10"/>
+          <p:cNvSpPr/>
+          <p:nvPr/>
+        </p:nvSpPr>
+        <p:spPr>
+          <a:xfrm>
+            <a:off x="6080760" y="822960"/>
+            <a:ext cx="2697480" cy="411480"/>
+          </a:xfrm>
+          <a:prstGeom prst="rect">
+            <a:avLst/>
+          </a:prstGeom>
+          <a:solidFill>
+            <a:srgbClr val="FF5A36"/>
+          </a:solidFill>
+          <a:ln/>
+        </p:spPr>
+      </p:sp>
+      <p:sp>
+        <p:nvSpPr>
+          <p:cNvPr id="13" name="Text 11"/>
+          <p:cNvSpPr/>
+          <p:nvPr/>
+        </p:nvSpPr>
+        <p:spPr>
+          <a:xfrm>
+            <a:off x="6080760" y="868680"/>
+            <a:ext cx="2697480" cy="320040"/>
+          </a:xfrm>
+          <a:prstGeom prst="rect">
+            <a:avLst/>
+          </a:prstGeom>
+          <a:noFill/>
+          <a:ln/>
+        </p:spPr>
+        <p:txBody>
+          <a:bodyPr wrap="square" rtlCol="0" anchor="ctr"/>
+          <a:lstStyle/>
+          <a:p>
+            <a:pPr algn="ctr" indent="0" marL="0">
+              <a:buNone/>
+            </a:pPr>
+            <a:r>
+              <a:rPr lang="en-US" sz="1500" b="1" dirty="0">
+                <a:solidFill>
+                  <a:srgbClr val="FFFFFF"/>
+                </a:solidFill>
+                <a:latin typeface="Arial" pitchFamily="34" charset="0"/>
+                <a:ea typeface="Arial" pitchFamily="34" charset="-122"/>
+                <a:cs typeface="Arial" pitchFamily="34" charset="-120"/>
+              </a:rPr>
+              <a:t>📱 自媒体</a:t>
+            </a:r>
+            <a:endParaRPr lang="en-US" sz="1500" dirty="0"/>
+          </a:p>
+        </p:txBody>
+      </p:sp>
+      <p:sp>
+        <p:nvSpPr>
+          <p:cNvPr id="14" name="Text 12"/>
+          <p:cNvSpPr/>
+          <p:nvPr/>
+        </p:nvSpPr>
+        <p:spPr>
+          <a:xfrm>
+            <a:off x="6172200" y="1325880"/>
+            <a:ext cx="2514600" cy="3291840"/>
           </a:xfrm>
           <a:prstGeom prst="rect">
             <a:avLst/>
@@ -2500,7 +2948,7 @@
               <a:buNone/>
             </a:pPr>
             <a:r>
-              <a:rPr lang="en-US" sz="1200" b="1" dirty="0">
+              <a:rPr lang="en-US" sz="900" b="1" dirty="0">
                 <a:solidFill>
                   <a:srgbClr val="2D3748"/>
                 </a:solidFill>
@@ -2508,16 +2956,16 @@
                 <a:ea typeface="Arial" pitchFamily="34" charset="-122"/>
                 <a:cs typeface="Arial" pitchFamily="34" charset="-120"/>
               </a:rPr>
-              <a:t>客服回复</a:t>
-            </a:r>
-            <a:endParaRPr lang="en-US" sz="1200" dirty="0"/>
-          </a:p>
-          <a:p>
-            <a:pPr indent="0" marL="0">
-              <a:buNone/>
-            </a:pPr>
-            <a:r>
-              <a:rPr lang="en-US" sz="1200" dirty="0">
+              <a:t>🎬 视频制作</a:t>
+            </a:r>
+            <a:endParaRPr lang="en-US" sz="900" dirty="0"/>
+          </a:p>
+          <a:p>
+            <a:pPr indent="0" marL="0">
+              <a:buNone/>
+            </a:pPr>
+            <a:r>
+              <a:rPr lang="en-US" sz="900" dirty="0">
                 <a:solidFill>
                   <a:srgbClr val="2D3748"/>
                 </a:solidFill>
@@ -2525,22 +2973,16 @@
                 <a:ea typeface="Arial" pitchFamily="34" charset="-122"/>
                 <a:cs typeface="Arial" pitchFamily="34" charset="-120"/>
               </a:rPr>
-              <a:t>每次手动敲字 → 自动按话术库回复</a:t>
-            </a:r>
-            <a:endParaRPr lang="en-US" sz="1200" dirty="0"/>
-          </a:p>
-          <a:p>
-            <a:pPr indent="0" marL="0">
-              <a:buNone/>
-            </a:pPr>
-            <a:endParaRPr lang="en-US" sz="1200" dirty="0"/>
-          </a:p>
-          <a:p>
-            <a:pPr indent="0" marL="0">
-              <a:buNone/>
-            </a:pPr>
-            <a:r>
-              <a:rPr lang="en-US" sz="1200" b="1" dirty="0">
+              <a:t>手动剪辑 → AI 自动提取片段</a:t>
+            </a:r>
+            <a:endParaRPr lang="en-US" sz="900" dirty="0"/>
+          </a:p>
+          <a:p>
+            <a:pPr indent="0" marL="0">
+              <a:buNone/>
+            </a:pPr>
+            <a:r>
+              <a:rPr lang="en-US" sz="900" dirty="0">
                 <a:solidFill>
                   <a:srgbClr val="2D3748"/>
                 </a:solidFill>
@@ -2548,16 +2990,36 @@
                 <a:ea typeface="Arial" pitchFamily="34" charset="-122"/>
                 <a:cs typeface="Arial" pitchFamily="34" charset="-120"/>
               </a:rPr>
-              <a:t>社媒运营</a:t>
-            </a:r>
-            <a:endParaRPr lang="en-US" sz="1200" dirty="0"/>
-          </a:p>
-          <a:p>
-            <a:pPr indent="0" marL="0">
-              <a:buNone/>
-            </a:pPr>
-            <a:r>
-              <a:rPr lang="en-US" sz="1200" dirty="0">
+              <a:t>Skill: </a:t>
+            </a:r>
+            <a:pPr indent="0" marL="0">
+              <a:buNone/>
+            </a:pPr>
+            <a:r>
+              <a:rPr lang="en-US" sz="900" b="1" dirty="0">
+                <a:solidFill>
+                  <a:srgbClr val="FF5A36"/>
+                </a:solidFill>
+                <a:latin typeface="Arial" pitchFamily="34" charset="0"/>
+                <a:ea typeface="Arial" pitchFamily="34" charset="-122"/>
+                <a:cs typeface="Arial" pitchFamily="34" charset="-120"/>
+              </a:rPr>
+              <a:t>Video Frames</a:t>
+            </a:r>
+            <a:endParaRPr lang="en-US" sz="900" dirty="0"/>
+          </a:p>
+          <a:p>
+            <a:pPr indent="0" marL="0">
+              <a:buNone/>
+            </a:pPr>
+            <a:endParaRPr lang="en-US" sz="900" dirty="0"/>
+          </a:p>
+          <a:p>
+            <a:pPr indent="0" marL="0">
+              <a:buNone/>
+            </a:pPr>
+            <a:r>
+              <a:rPr lang="en-US" sz="900" b="1" dirty="0">
                 <a:solidFill>
                   <a:srgbClr val="2D3748"/>
                 </a:solidFill>
@@ -2565,22 +3027,16 @@
                 <a:ea typeface="Arial" pitchFamily="34" charset="-122"/>
                 <a:cs typeface="Arial" pitchFamily="34" charset="-120"/>
               </a:rPr>
-              <a:t>每天手动发 → 自动定时发布</a:t>
-            </a:r>
-            <a:endParaRPr lang="en-US" sz="1200" dirty="0"/>
-          </a:p>
-          <a:p>
-            <a:pPr indent="0" marL="0">
-              <a:buNone/>
-            </a:pPr>
-            <a:endParaRPr lang="en-US" sz="1200" dirty="0"/>
-          </a:p>
-          <a:p>
-            <a:pPr indent="0" marL="0">
-              <a:buNone/>
-            </a:pPr>
-            <a:r>
-              <a:rPr lang="en-US" sz="1200" b="1" dirty="0">
+              <a:t>✍️ 内容创作</a:t>
+            </a:r>
+            <a:endParaRPr lang="en-US" sz="900" dirty="0"/>
+          </a:p>
+          <a:p>
+            <a:pPr indent="0" marL="0">
+              <a:buNone/>
+            </a:pPr>
+            <a:r>
+              <a:rPr lang="en-US" sz="900" dirty="0">
                 <a:solidFill>
                   <a:srgbClr val="2D3748"/>
                 </a:solidFill>
@@ -2588,16 +3044,16 @@
                 <a:ea typeface="Arial" pitchFamily="34" charset="-122"/>
                 <a:cs typeface="Arial" pitchFamily="34" charset="-120"/>
               </a:rPr>
-              <a:t>数据分析</a:t>
-            </a:r>
-            <a:endParaRPr lang="en-US" sz="1200" dirty="0"/>
-          </a:p>
-          <a:p>
-            <a:pPr indent="0" marL="0">
-              <a:buNone/>
-            </a:pPr>
-            <a:r>
-              <a:rPr lang="en-US" sz="1200" dirty="0">
+              <a:t>每天手动写 → 自动按风格生成</a:t>
+            </a:r>
+            <a:endParaRPr lang="en-US" sz="900" dirty="0"/>
+          </a:p>
+          <a:p>
+            <a:pPr indent="0" marL="0">
+              <a:buNone/>
+            </a:pPr>
+            <a:r>
+              <a:rPr lang="en-US" sz="900" dirty="0">
                 <a:solidFill>
                   <a:srgbClr val="2D3748"/>
                 </a:solidFill>
@@ -2605,9 +3061,94 @@
                 <a:ea typeface="Arial" pitchFamily="34" charset="-122"/>
                 <a:cs typeface="Arial" pitchFamily="34" charset="-120"/>
               </a:rPr>
-              <a:t>每周手动汇总 → 自动生成报表</a:t>
-            </a:r>
-            <a:endParaRPr lang="en-US" sz="1200" dirty="0"/>
+              <a:t>Skill: </a:t>
+            </a:r>
+            <a:pPr indent="0" marL="0">
+              <a:buNone/>
+            </a:pPr>
+            <a:r>
+              <a:rPr lang="en-US" sz="900" b="1" dirty="0">
+                <a:solidFill>
+                  <a:srgbClr val="FF5A36"/>
+                </a:solidFill>
+                <a:latin typeface="Arial" pitchFamily="34" charset="0"/>
+                <a:ea typeface="Arial" pitchFamily="34" charset="-122"/>
+                <a:cs typeface="Arial" pitchFamily="34" charset="-120"/>
+              </a:rPr>
+              <a:t>写作 Skill</a:t>
+            </a:r>
+            <a:endParaRPr lang="en-US" sz="900" dirty="0"/>
+          </a:p>
+          <a:p>
+            <a:pPr indent="0" marL="0">
+              <a:buNone/>
+            </a:pPr>
+            <a:endParaRPr lang="en-US" sz="900" dirty="0"/>
+          </a:p>
+          <a:p>
+            <a:pPr indent="0" marL="0">
+              <a:buNone/>
+            </a:pPr>
+            <a:r>
+              <a:rPr lang="en-US" sz="900" b="1" dirty="0">
+                <a:solidFill>
+                  <a:srgbClr val="2D3748"/>
+                </a:solidFill>
+                <a:latin typeface="Arial" pitchFamily="34" charset="0"/>
+                <a:ea typeface="Arial" pitchFamily="34" charset="-122"/>
+                <a:cs typeface="Arial" pitchFamily="34" charset="-120"/>
+              </a:rPr>
+              <a:t>📊 竞品监控</a:t>
+            </a:r>
+            <a:endParaRPr lang="en-US" sz="900" dirty="0"/>
+          </a:p>
+          <a:p>
+            <a:pPr indent="0" marL="0">
+              <a:buNone/>
+            </a:pPr>
+            <a:r>
+              <a:rPr lang="en-US" sz="900" dirty="0">
+                <a:solidFill>
+                  <a:srgbClr val="2D3748"/>
+                </a:solidFill>
+                <a:latin typeface="Arial" pitchFamily="34" charset="0"/>
+                <a:ea typeface="Arial" pitchFamily="34" charset="-122"/>
+                <a:cs typeface="Arial" pitchFamily="34" charset="-120"/>
+              </a:rPr>
+              <a:t>手动去看 → 自动推送变化</a:t>
+            </a:r>
+            <a:endParaRPr lang="en-US" sz="900" dirty="0"/>
+          </a:p>
+          <a:p>
+            <a:pPr indent="0" marL="0">
+              <a:buNone/>
+            </a:pPr>
+            <a:r>
+              <a:rPr lang="en-US" sz="900" dirty="0">
+                <a:solidFill>
+                  <a:srgbClr val="2D3748"/>
+                </a:solidFill>
+                <a:latin typeface="Arial" pitchFamily="34" charset="0"/>
+                <a:ea typeface="Arial" pitchFamily="34" charset="-122"/>
+                <a:cs typeface="Arial" pitchFamily="34" charset="-120"/>
+              </a:rPr>
+              <a:t>Skill: </a:t>
+            </a:r>
+            <a:pPr indent="0" marL="0">
+              <a:buNone/>
+            </a:pPr>
+            <a:r>
+              <a:rPr lang="en-US" sz="900" b="1" dirty="0">
+                <a:solidFill>
+                  <a:srgbClr val="FF5A36"/>
+                </a:solidFill>
+                <a:latin typeface="Arial" pitchFamily="34" charset="0"/>
+                <a:ea typeface="Arial" pitchFamily="34" charset="-122"/>
+                <a:cs typeface="Arial" pitchFamily="34" charset="-120"/>
+              </a:rPr>
+              <a:t>Browser + 搜索</a:t>
+            </a:r>
+            <a:endParaRPr lang="en-US" sz="900" dirty="0"/>
           </a:p>
         </p:txBody>
       </p:sp>
@@ -2700,13 +3241,6 @@
             <a:srgbClr val="FFFFFF"/>
           </a:solidFill>
           <a:ln/>
-          <a:effectLst>
-            <a:outerShdw sx="100000" sy="100000" kx="0" ky="0" algn="bl" rotWithShape="0" blurRad="101600" dist="25400" dir="8100000">
-              <a:srgbClr val="000000">
-                <a:alpha val="15000"/>
-              </a:srgbClr>
-            </a:outerShdw>
-          </a:effectLst>
         </p:spPr>
       </p:sp>
       <p:sp>
@@ -2839,13 +3373,6 @@
             <a:srgbClr val="FFFFFF"/>
           </a:solidFill>
           <a:ln/>
-          <a:effectLst>
-            <a:outerShdw sx="100000" sy="100000" kx="0" ky="0" algn="bl" rotWithShape="0" blurRad="101600" dist="25400" dir="8100000">
-              <a:srgbClr val="000000">
-                <a:alpha val="15000"/>
-              </a:srgbClr>
-            </a:outerShdw>
-          </a:effectLst>
         </p:spPr>
       </p:sp>
       <p:sp>
@@ -3052,7 +3579,7 @@
                 <a:ea typeface="Arial" pitchFamily="34" charset="-122"/>
                 <a:cs typeface="Arial" pitchFamily="34" charset="-120"/>
               </a:rPr>
-              <a:t>开发「Amazon 运营 Skill 包」（关键词调研+竞品分析+review提取）→ 定价 $99/月卖给其他卖家 → 这就是一门生意</a:t>
+              <a:t>开发「Amazon 运营 Skill 包」（关键词调研+竞品分析+review提取）→ 定价 $99/月 → 这就是一门生意</a:t>
             </a:r>
             <a:endParaRPr lang="en-US" sz="1200" dirty="0"/>
           </a:p>
@@ -3137,8 +3664,8 @@
         </p:nvSpPr>
         <p:spPr>
           <a:xfrm>
-            <a:off x="548640" y="1143000"/>
-            <a:ext cx="365760" cy="365760"/>
+            <a:off x="548640" y="1097280"/>
+            <a:ext cx="320040" cy="320040"/>
           </a:xfrm>
           <a:prstGeom prst="ellipse">
             <a:avLst/>
@@ -3157,8 +3684,8 @@
         </p:nvSpPr>
         <p:spPr>
           <a:xfrm>
-            <a:off x="548640" y="1143000"/>
-            <a:ext cx="365760" cy="365760"/>
+            <a:off x="548640" y="1097280"/>
+            <a:ext cx="320040" cy="320040"/>
           </a:xfrm>
           <a:prstGeom prst="rect">
             <a:avLst/>
@@ -3174,7 +3701,7 @@
               <a:buNone/>
             </a:pPr>
             <a:r>
-              <a:rPr lang="en-US" sz="1400" b="1" dirty="0">
+              <a:rPr lang="en-US" sz="1200" b="1" dirty="0">
                 <a:solidFill>
                   <a:srgbClr val="FFFFFF"/>
                 </a:solidFill>
@@ -3184,7 +3711,7 @@
               </a:rPr>
               <a:t>1</a:t>
             </a:r>
-            <a:endParaRPr lang="en-US" sz="1400" dirty="0"/>
+            <a:endParaRPr lang="en-US" sz="1200" dirty="0"/>
           </a:p>
         </p:txBody>
       </p:sp>
@@ -3196,8 +3723,8 @@
         </p:nvSpPr>
         <p:spPr>
           <a:xfrm>
-            <a:off x="1051560" y="1143000"/>
-            <a:ext cx="1828800" cy="365760"/>
+            <a:off x="1005840" y="1097280"/>
+            <a:ext cx="1828800" cy="320040"/>
           </a:xfrm>
           <a:prstGeom prst="rect">
             <a:avLst/>
@@ -3213,7 +3740,7 @@
               <a:buNone/>
             </a:pPr>
             <a:r>
-              <a:rPr lang="en-US" sz="1600" b="1" dirty="0">
+              <a:rPr lang="en-US" sz="1500" b="1" dirty="0">
                 <a:solidFill>
                   <a:srgbClr val="2D3748"/>
                 </a:solidFill>
@@ -3223,7 +3750,7 @@
               </a:rPr>
               <a:t>职场效率类</a:t>
             </a:r>
-            <a:endParaRPr lang="en-US" sz="1600" dirty="0"/>
+            <a:endParaRPr lang="en-US" sz="1500" dirty="0"/>
           </a:p>
         </p:txBody>
       </p:sp>
@@ -3235,8 +3762,8 @@
         </p:nvSpPr>
         <p:spPr>
           <a:xfrm>
-            <a:off x="1051560" y="1554480"/>
-            <a:ext cx="7315200" cy="365760"/>
+            <a:off x="1005840" y="1417320"/>
+            <a:ext cx="7315200" cy="320040"/>
           </a:xfrm>
           <a:prstGeom prst="rect">
             <a:avLst/>
@@ -3252,7 +3779,7 @@
               <a:buNone/>
             </a:pPr>
             <a:r>
-              <a:rPr lang="en-US" sz="1200" dirty="0">
+              <a:rPr lang="en-US" sz="1100" dirty="0">
                 <a:solidFill>
                   <a:srgbClr val="2D3748"/>
                 </a:solidFill>
@@ -3260,9 +3787,9 @@
                 <a:ea typeface="Arial" pitchFamily="34" charset="-122"/>
                 <a:cs typeface="Arial" pitchFamily="34" charset="-120"/>
               </a:rPr>
-              <a:t>天气查询 📡 · 笔记系统 📝 · 提醒事项 ⏰ · 日历 📅</a:t>
-            </a:r>
-            <a:endParaRPr lang="en-US" sz="1200" dirty="0"/>
+              <a:t>天气查询 · 笔记系统 · 提醒事项 · 日历</a:t>
+            </a:r>
+            <a:endParaRPr lang="en-US" sz="1100" dirty="0"/>
           </a:p>
         </p:txBody>
       </p:sp>
@@ -3274,8 +3801,8 @@
         </p:nvSpPr>
         <p:spPr>
           <a:xfrm>
-            <a:off x="548640" y="2194560"/>
-            <a:ext cx="365760" cy="365760"/>
+            <a:off x="548640" y="2011680"/>
+            <a:ext cx="320040" cy="320040"/>
           </a:xfrm>
           <a:prstGeom prst="ellipse">
             <a:avLst/>
@@ -3294,8 +3821,8 @@
         </p:nvSpPr>
         <p:spPr>
           <a:xfrm>
-            <a:off x="548640" y="2194560"/>
-            <a:ext cx="365760" cy="365760"/>
+            <a:off x="548640" y="2011680"/>
+            <a:ext cx="320040" cy="320040"/>
           </a:xfrm>
           <a:prstGeom prst="rect">
             <a:avLst/>
@@ -3311,7 +3838,7 @@
               <a:buNone/>
             </a:pPr>
             <a:r>
-              <a:rPr lang="en-US" sz="1400" b="1" dirty="0">
+              <a:rPr lang="en-US" sz="1200" b="1" dirty="0">
                 <a:solidFill>
                   <a:srgbClr val="FFFFFF"/>
                 </a:solidFill>
@@ -3321,7 +3848,7 @@
               </a:rPr>
               <a:t>2</a:t>
             </a:r>
-            <a:endParaRPr lang="en-US" sz="1400" dirty="0"/>
+            <a:endParaRPr lang="en-US" sz="1200" dirty="0"/>
           </a:p>
         </p:txBody>
       </p:sp>
@@ -3333,8 +3860,8 @@
         </p:nvSpPr>
         <p:spPr>
           <a:xfrm>
-            <a:off x="1051560" y="2194560"/>
-            <a:ext cx="1828800" cy="365760"/>
+            <a:off x="1005840" y="2011680"/>
+            <a:ext cx="1828800" cy="320040"/>
           </a:xfrm>
           <a:prstGeom prst="rect">
             <a:avLst/>
@@ -3350,7 +3877,7 @@
               <a:buNone/>
             </a:pPr>
             <a:r>
-              <a:rPr lang="en-US" sz="1600" b="1" dirty="0">
+              <a:rPr lang="en-US" sz="1500" b="1" dirty="0">
                 <a:solidFill>
                   <a:srgbClr val="2D3748"/>
                 </a:solidFill>
@@ -3360,7 +3887,7 @@
               </a:rPr>
               <a:t>技术类</a:t>
             </a:r>
-            <a:endParaRPr lang="en-US" sz="1600" dirty="0"/>
+            <a:endParaRPr lang="en-US" sz="1500" dirty="0"/>
           </a:p>
         </p:txBody>
       </p:sp>
@@ -3372,8 +3899,8 @@
         </p:nvSpPr>
         <p:spPr>
           <a:xfrm>
-            <a:off x="1051560" y="2606040"/>
-            <a:ext cx="7315200" cy="365760"/>
+            <a:off x="1005840" y="2331720"/>
+            <a:ext cx="7315200" cy="320040"/>
           </a:xfrm>
           <a:prstGeom prst="rect">
             <a:avLst/>
@@ -3389,7 +3916,7 @@
               <a:buNone/>
             </a:pPr>
             <a:r>
-              <a:rPr lang="en-US" sz="1200" dirty="0">
+              <a:rPr lang="en-US" sz="1100" dirty="0">
                 <a:solidFill>
                   <a:srgbClr val="2D3748"/>
                 </a:solidFill>
@@ -3397,9 +3924,9 @@
                 <a:ea typeface="Arial" pitchFamily="34" charset="-122"/>
                 <a:cs typeface="Arial" pitchFamily="34" charset="-120"/>
               </a:rPr>
-              <a:t>GitHub（PR/Issue管理）· 编码助手（Codex后台编程）· 浏览器控制（自动化网页）</a:t>
-            </a:r>
-            <a:endParaRPr lang="en-US" sz="1200" dirty="0"/>
+              <a:t>GitHub · 编码助手 · 浏览器控制 · PPT</a:t>
+            </a:r>
+            <a:endParaRPr lang="en-US" sz="1100" dirty="0"/>
           </a:p>
         </p:txBody>
       </p:sp>
@@ -3411,8 +3938,8 @@
         </p:nvSpPr>
         <p:spPr>
           <a:xfrm>
-            <a:off x="548640" y="3246120"/>
-            <a:ext cx="365760" cy="365760"/>
+            <a:off x="548640" y="2926080"/>
+            <a:ext cx="320040" cy="320040"/>
           </a:xfrm>
           <a:prstGeom prst="ellipse">
             <a:avLst/>
@@ -3431,8 +3958,8 @@
         </p:nvSpPr>
         <p:spPr>
           <a:xfrm>
-            <a:off x="548640" y="3246120"/>
-            <a:ext cx="365760" cy="365760"/>
+            <a:off x="548640" y="2926080"/>
+            <a:ext cx="320040" cy="320040"/>
           </a:xfrm>
           <a:prstGeom prst="rect">
             <a:avLst/>
@@ -3448,7 +3975,7 @@
               <a:buNone/>
             </a:pPr>
             <a:r>
-              <a:rPr lang="en-US" sz="1400" b="1" dirty="0">
+              <a:rPr lang="en-US" sz="1200" b="1" dirty="0">
                 <a:solidFill>
                   <a:srgbClr val="FFFFFF"/>
                 </a:solidFill>
@@ -3458,7 +3985,7 @@
               </a:rPr>
               <a:t>3</a:t>
             </a:r>
-            <a:endParaRPr lang="en-US" sz="1400" dirty="0"/>
+            <a:endParaRPr lang="en-US" sz="1200" dirty="0"/>
           </a:p>
         </p:txBody>
       </p:sp>
@@ -3470,8 +3997,8 @@
         </p:nvSpPr>
         <p:spPr>
           <a:xfrm>
-            <a:off x="1051560" y="3246120"/>
-            <a:ext cx="1828800" cy="365760"/>
+            <a:off x="1005840" y="2926080"/>
+            <a:ext cx="1828800" cy="320040"/>
           </a:xfrm>
           <a:prstGeom prst="rect">
             <a:avLst/>
@@ -3487,7 +4014,7 @@
               <a:buNone/>
             </a:pPr>
             <a:r>
-              <a:rPr lang="en-US" sz="1600" b="1" dirty="0">
+              <a:rPr lang="en-US" sz="1500" b="1" dirty="0">
                 <a:solidFill>
                   <a:srgbClr val="2D3748"/>
                 </a:solidFill>
@@ -3497,7 +4024,7 @@
               </a:rPr>
               <a:t>企业协作</a:t>
             </a:r>
-            <a:endParaRPr lang="en-US" sz="1600" dirty="0"/>
+            <a:endParaRPr lang="en-US" sz="1500" dirty="0"/>
           </a:p>
         </p:txBody>
       </p:sp>
@@ -3509,8 +4036,8 @@
         </p:nvSpPr>
         <p:spPr>
           <a:xfrm>
-            <a:off x="1051560" y="3657600"/>
-            <a:ext cx="7315200" cy="365760"/>
+            <a:off x="1005840" y="3246120"/>
+            <a:ext cx="7315200" cy="320040"/>
           </a:xfrm>
           <a:prstGeom prst="rect">
             <a:avLst/>
@@ -3526,7 +4053,7 @@
               <a:buNone/>
             </a:pPr>
             <a:r>
-              <a:rPr lang="en-US" sz="1200" dirty="0">
+              <a:rPr lang="en-US" sz="1100" dirty="0">
                 <a:solidFill>
                   <a:srgbClr val="2D3748"/>
                 </a:solidFill>
@@ -3534,9 +4061,9 @@
                 <a:ea typeface="Arial" pitchFamily="34" charset="-122"/>
                 <a:cs typeface="Arial" pitchFamily="34" charset="-120"/>
               </a:rPr>
-              <a:t>Notion · Slack · Discord · 飞书 · 邮件</a:t>
-            </a:r>
-            <a:endParaRPr lang="en-US" sz="1200" dirty="0"/>
+              <a:t>Notion · Slack · Discord · 飞书</a:t>
+            </a:r>
+            <a:endParaRPr lang="en-US" sz="1100" dirty="0"/>
           </a:p>
         </p:txBody>
       </p:sp>
@@ -3548,8 +4075,8 @@
         </p:nvSpPr>
         <p:spPr>
           <a:xfrm>
-            <a:off x="548640" y="4297680"/>
-            <a:ext cx="365760" cy="365760"/>
+            <a:off x="548640" y="3840480"/>
+            <a:ext cx="320040" cy="320040"/>
           </a:xfrm>
           <a:prstGeom prst="ellipse">
             <a:avLst/>
@@ -3568,8 +4095,8 @@
         </p:nvSpPr>
         <p:spPr>
           <a:xfrm>
-            <a:off x="548640" y="4297680"/>
-            <a:ext cx="365760" cy="365760"/>
+            <a:off x="548640" y="3840480"/>
+            <a:ext cx="320040" cy="320040"/>
           </a:xfrm>
           <a:prstGeom prst="rect">
             <a:avLst/>
@@ -3585,7 +4112,7 @@
               <a:buNone/>
             </a:pPr>
             <a:r>
-              <a:rPr lang="en-US" sz="1400" b="1" dirty="0">
+              <a:rPr lang="en-US" sz="1200" b="1" dirty="0">
                 <a:solidFill>
                   <a:srgbClr val="FFFFFF"/>
                 </a:solidFill>
@@ -3595,7 +4122,7 @@
               </a:rPr>
               <a:t>4</a:t>
             </a:r>
-            <a:endParaRPr lang="en-US" sz="1400" dirty="0"/>
+            <a:endParaRPr lang="en-US" sz="1200" dirty="0"/>
           </a:p>
         </p:txBody>
       </p:sp>
@@ -3607,8 +4134,8 @@
         </p:nvSpPr>
         <p:spPr>
           <a:xfrm>
-            <a:off x="1051560" y="4297680"/>
-            <a:ext cx="2743200" cy="365760"/>
+            <a:off x="1005840" y="3840480"/>
+            <a:ext cx="2743200" cy="320040"/>
           </a:xfrm>
           <a:prstGeom prst="rect">
             <a:avLst/>
@@ -3624,7 +4151,7 @@
               <a:buNone/>
             </a:pPr>
             <a:r>
-              <a:rPr lang="en-US" sz="1600" b="1" dirty="0">
+              <a:rPr lang="en-US" sz="1500" b="1" dirty="0">
                 <a:solidFill>
                   <a:srgbClr val="2D3748"/>
                 </a:solidFill>
@@ -3634,7 +4161,7 @@
               </a:rPr>
               <a:t>ClawHub 技能市场</a:t>
             </a:r>
-            <a:endParaRPr lang="en-US" sz="1600" dirty="0"/>
+            <a:endParaRPr lang="en-US" sz="1500" dirty="0"/>
           </a:p>
         </p:txBody>
       </p:sp>
@@ -3646,7 +4173,7 @@
         </p:nvSpPr>
         <p:spPr>
           <a:xfrm>
-            <a:off x="1051560" y="4663440"/>
+            <a:off x="1005840" y="4160520"/>
             <a:ext cx="7315200" cy="274320"/>
           </a:xfrm>
           <a:prstGeom prst="rect">
@@ -3757,7 +4284,7 @@
         <p:spPr>
           <a:xfrm>
             <a:off x="457200" y="1097280"/>
-            <a:ext cx="8229600" cy="2560320"/>
+            <a:ext cx="8229600" cy="2377440"/>
           </a:xfrm>
           <a:prstGeom prst="rect">
             <a:avLst/>
@@ -3816,7 +4343,7 @@
         <p:spPr>
           <a:xfrm>
             <a:off x="640080" y="1691640"/>
-            <a:ext cx="7772400" cy="1828800"/>
+            <a:ext cx="7772400" cy="1645920"/>
           </a:xfrm>
           <a:prstGeom prst="rect">
             <a:avLst/>
@@ -3832,7 +4359,7 @@
               <a:buNone/>
             </a:pPr>
             <a:r>
-              <a:rPr lang="en-US" sz="1400" dirty="0">
+              <a:rPr lang="en-US" sz="1300" dirty="0">
                 <a:solidFill>
                   <a:srgbClr val="FFFFFF"/>
                 </a:solidFill>
@@ -3842,14 +4369,14 @@
               </a:rPr>
               <a:t># 查看已安装技能</a:t>
             </a:r>
-            <a:endParaRPr lang="en-US" sz="1400" dirty="0"/>
-          </a:p>
-          <a:p>
-            <a:pPr indent="0" marL="0">
-              <a:buNone/>
-            </a:pPr>
-            <a:r>
-              <a:rPr lang="en-US" sz="1400" dirty="0">
+            <a:endParaRPr lang="en-US" sz="1300" dirty="0"/>
+          </a:p>
+          <a:p>
+            <a:pPr indent="0" marL="0">
+              <a:buNone/>
+            </a:pPr>
+            <a:r>
+              <a:rPr lang="en-US" sz="1300" dirty="0">
                 <a:solidFill>
                   <a:srgbClr val="FFFFFF"/>
                 </a:solidFill>
@@ -3859,20 +4386,20 @@
               </a:rPr>
               <a:t>openclaw skills list</a:t>
             </a:r>
-            <a:endParaRPr lang="en-US" sz="1400" dirty="0"/>
-          </a:p>
-          <a:p>
-            <a:pPr indent="0" marL="0">
-              <a:buNone/>
-            </a:pPr>
-            <a:endParaRPr lang="en-US" sz="1400" dirty="0"/>
-          </a:p>
-          <a:p>
-            <a:pPr indent="0" marL="0">
-              <a:buNone/>
-            </a:pPr>
-            <a:r>
-              <a:rPr lang="en-US" sz="1400" dirty="0">
+            <a:endParaRPr lang="en-US" sz="1300" dirty="0"/>
+          </a:p>
+          <a:p>
+            <a:pPr indent="0" marL="0">
+              <a:buNone/>
+            </a:pPr>
+            <a:endParaRPr lang="en-US" sz="1300" dirty="0"/>
+          </a:p>
+          <a:p>
+            <a:pPr indent="0" marL="0">
+              <a:buNone/>
+            </a:pPr>
+            <a:r>
+              <a:rPr lang="en-US" sz="1300" dirty="0">
                 <a:solidFill>
                   <a:srgbClr val="FFFFFF"/>
                 </a:solidFill>
@@ -3882,14 +4409,14 @@
               </a:rPr>
               <a:t># 安装新技能</a:t>
             </a:r>
-            <a:endParaRPr lang="en-US" sz="1400" dirty="0"/>
-          </a:p>
-          <a:p>
-            <a:pPr indent="0" marL="0">
-              <a:buNone/>
-            </a:pPr>
-            <a:r>
-              <a:rPr lang="en-US" sz="1400" dirty="0">
+            <a:endParaRPr lang="en-US" sz="1300" dirty="0"/>
+          </a:p>
+          <a:p>
+            <a:pPr indent="0" marL="0">
+              <a:buNone/>
+            </a:pPr>
+            <a:r>
+              <a:rPr lang="en-US" sz="1300" dirty="0">
                 <a:solidFill>
                   <a:srgbClr val="FFFFFF"/>
                 </a:solidFill>
@@ -3899,20 +4426,20 @@
               </a:rPr>
               <a:t>clawhub install weather</a:t>
             </a:r>
-            <a:endParaRPr lang="en-US" sz="1400" dirty="0"/>
-          </a:p>
-          <a:p>
-            <a:pPr indent="0" marL="0">
-              <a:buNone/>
-            </a:pPr>
-            <a:endParaRPr lang="en-US" sz="1400" dirty="0"/>
-          </a:p>
-          <a:p>
-            <a:pPr indent="0" marL="0">
-              <a:buNone/>
-            </a:pPr>
-            <a:r>
-              <a:rPr lang="en-US" sz="1400" dirty="0">
+            <a:endParaRPr lang="en-US" sz="1300" dirty="0"/>
+          </a:p>
+          <a:p>
+            <a:pPr indent="0" marL="0">
+              <a:buNone/>
+            </a:pPr>
+            <a:endParaRPr lang="en-US" sz="1300" dirty="0"/>
+          </a:p>
+          <a:p>
+            <a:pPr indent="0" marL="0">
+              <a:buNone/>
+            </a:pPr>
+            <a:r>
+              <a:rPr lang="en-US" sz="1300" dirty="0">
                 <a:solidFill>
                   <a:srgbClr val="FFFFFF"/>
                 </a:solidFill>
@@ -3922,14 +4449,14 @@
               </a:rPr>
               <a:t># 直接开聊</a:t>
             </a:r>
-            <a:endParaRPr lang="en-US" sz="1400" dirty="0"/>
-          </a:p>
-          <a:p>
-            <a:pPr indent="0" marL="0">
-              <a:buNone/>
-            </a:pPr>
-            <a:r>
-              <a:rPr lang="en-US" sz="1400" dirty="0">
+            <a:endParaRPr lang="en-US" sz="1300" dirty="0"/>
+          </a:p>
+          <a:p>
+            <a:pPr indent="0" marL="0">
+              <a:buNone/>
+            </a:pPr>
+            <a:r>
+              <a:rPr lang="en-US" sz="1300" dirty="0">
                 <a:solidFill>
                   <a:srgbClr val="FFFFFF"/>
                 </a:solidFill>
@@ -3939,24 +4466,7 @@
               </a:rPr>
               <a:t>"北京今天天气怎么样？"</a:t>
             </a:r>
-            <a:endParaRPr lang="en-US" sz="1400" dirty="0"/>
-          </a:p>
-          <a:p>
-            <a:pPr indent="0" marL="0">
-              <a:buNone/>
-            </a:pPr>
-            <a:r>
-              <a:rPr lang="en-US" sz="1400" dirty="0">
-                <a:solidFill>
-                  <a:srgbClr val="FFFFFF"/>
-                </a:solidFill>
-                <a:latin typeface="Consolas" pitchFamily="34" charset="0"/>
-                <a:ea typeface="Consolas" pitchFamily="34" charset="-122"/>
-                <a:cs typeface="Consolas" pitchFamily="34" charset="-120"/>
-              </a:rPr>
-              <a:t>"帮我写个请假条"</a:t>
-            </a:r>
-            <a:endParaRPr lang="en-US" sz="1400" dirty="0"/>
+            <a:endParaRPr lang="en-US" sz="1300" dirty="0"/>
           </a:p>
         </p:txBody>
       </p:sp>
@@ -3968,8 +4478,8 @@
         </p:nvSpPr>
         <p:spPr>
           <a:xfrm>
-            <a:off x="457200" y="3931920"/>
-            <a:ext cx="8229600" cy="914400"/>
+            <a:off x="457200" y="3749040"/>
+            <a:ext cx="8229600" cy="822960"/>
           </a:xfrm>
           <a:prstGeom prst="rect">
             <a:avLst/>
@@ -3978,13 +4488,6 @@
             <a:srgbClr val="FFFFFF"/>
           </a:solidFill>
           <a:ln/>
-          <a:effectLst>
-            <a:outerShdw sx="100000" sy="100000" kx="0" ky="0" algn="bl" rotWithShape="0" blurRad="76200" dist="25400" dir="8100000">
-              <a:srgbClr val="000000">
-                <a:alpha val="8000"/>
-              </a:srgbClr>
-            </a:outerShdw>
-          </a:effectLst>
         </p:spPr>
       </p:sp>
       <p:sp>
@@ -3995,8 +4498,8 @@
         </p:nvSpPr>
         <p:spPr>
           <a:xfrm>
-            <a:off x="640080" y="4069080"/>
-            <a:ext cx="1828800" cy="320040"/>
+            <a:off x="640080" y="3977640"/>
+            <a:ext cx="7772400" cy="365760"/>
           </a:xfrm>
           <a:prstGeom prst="rect">
             <a:avLst/>
@@ -4012,46 +4515,7 @@
               <a:buNone/>
             </a:pPr>
             <a:r>
-              <a:rPr lang="en-US" sz="1400" b="1" dirty="0">
-                <a:solidFill>
-                  <a:srgbClr val="FF5A36"/>
-                </a:solidFill>
-                <a:latin typeface="Arial" pitchFamily="34" charset="0"/>
-                <a:ea typeface="Arial" pitchFamily="34" charset="-122"/>
-                <a:cs typeface="Arial" pitchFamily="34" charset="-120"/>
-              </a:rPr>
-              <a:t>🤖 自动触发</a:t>
-            </a:r>
-            <a:endParaRPr lang="en-US" sz="1400" dirty="0"/>
-          </a:p>
-        </p:txBody>
-      </p:sp>
-      <p:sp>
-        <p:nvSpPr>
-          <p:cNvPr id="8" name="Text 6"/>
-          <p:cNvSpPr/>
-          <p:nvPr/>
-        </p:nvSpPr>
-        <p:spPr>
-          <a:xfrm>
-            <a:off x="640080" y="4434840"/>
-            <a:ext cx="7772400" cy="320040"/>
-          </a:xfrm>
-          <a:prstGeom prst="rect">
-            <a:avLst/>
-          </a:prstGeom>
-          <a:noFill/>
-          <a:ln/>
-        </p:spPr>
-        <p:txBody>
-          <a:bodyPr wrap="square" rtlCol="0" anchor="ctr"/>
-          <a:lstStyle/>
-          <a:p>
-            <a:pPr indent="0" marL="0">
-              <a:buNone/>
-            </a:pPr>
-            <a:r>
-              <a:rPr lang="en-US" sz="1200" dirty="0">
+              <a:rPr lang="en-US" sz="1300" dirty="0">
                 <a:solidFill>
                   <a:srgbClr val="2D3748"/>
                 </a:solidFill>
@@ -4059,9 +4523,9 @@
                 <a:ea typeface="Arial" pitchFamily="34" charset="-122"/>
                 <a:cs typeface="Arial" pitchFamily="34" charset="-120"/>
               </a:rPr>
-              <a:t>OpenClaw 会根据你的请求自动匹配合适的 Skill，不需要手动选择</a:t>
-            </a:r>
-            <a:endParaRPr lang="en-US" sz="1200" dirty="0"/>
+              <a:t>🤖 自动触发：OpenClaw 会根据你的请求自动匹配合适的 Skill</a:t>
+            </a:r>
+            <a:endParaRPr lang="en-US" sz="1300" dirty="0"/>
           </a:p>
         </p:txBody>
       </p:sp>
@@ -4145,7 +4609,7 @@
         <p:spPr>
           <a:xfrm>
             <a:off x="457200" y="1097280"/>
-            <a:ext cx="4114800" cy="2560320"/>
+            <a:ext cx="3931920" cy="2377440"/>
           </a:xfrm>
           <a:prstGeom prst="rect">
             <a:avLst/>
@@ -4204,7 +4668,7 @@
         <p:spPr>
           <a:xfrm>
             <a:off x="640080" y="1645920"/>
-            <a:ext cx="3840480" cy="1828800"/>
+            <a:ext cx="3657600" cy="1645920"/>
           </a:xfrm>
           <a:prstGeom prst="rect">
             <a:avLst/>
@@ -4220,7 +4684,7 @@
               <a:buNone/>
             </a:pPr>
             <a:r>
-              <a:rPr lang="en-US" sz="1100" b="1" dirty="0">
+              <a:rPr lang="en-US" sz="1100" dirty="0">
                 <a:solidFill>
                   <a:srgbClr val="FFFFFF"/>
                 </a:solidFill>
@@ -4245,7 +4709,7 @@
                 <a:ea typeface="Consolas" pitchFamily="34" charset="-122"/>
                 <a:cs typeface="Consolas" pitchFamily="34" charset="-120"/>
               </a:rPr>
-              <a:t>├── SKILL.md      ← 说明书（必需）</a:t>
+              <a:t>├── SKILL.md      ← 说明书</a:t>
             </a:r>
             <a:endParaRPr lang="en-US" sz="1100" dirty="0"/>
           </a:p>
@@ -4310,8 +4774,8 @@
         </p:nvSpPr>
         <p:spPr>
           <a:xfrm>
-            <a:off x="4846320" y="1097280"/>
-            <a:ext cx="3840480" cy="2560320"/>
+            <a:off x="4754880" y="1097280"/>
+            <a:ext cx="3931920" cy="2377440"/>
           </a:xfrm>
           <a:prstGeom prst="rect">
             <a:avLst/>
@@ -4320,13 +4784,6 @@
             <a:srgbClr val="FFFFFF"/>
           </a:solidFill>
           <a:ln/>
-          <a:effectLst>
-            <a:outerShdw sx="100000" sy="100000" kx="0" ky="0" algn="bl" rotWithShape="0" blurRad="76200" dist="25400" dir="8100000">
-              <a:srgbClr val="000000">
-                <a:alpha val="8000"/>
-              </a:srgbClr>
-            </a:outerShdw>
-          </a:effectLst>
         </p:spPr>
       </p:sp>
       <p:sp>
@@ -4337,7 +4794,7 @@
         </p:nvSpPr>
         <p:spPr>
           <a:xfrm>
-            <a:off x="5029200" y="1234440"/>
+            <a:off x="4937760" y="1234440"/>
             <a:ext cx="3657600" cy="320040"/>
           </a:xfrm>
           <a:prstGeom prst="rect">
@@ -4362,7 +4819,7 @@
                 <a:ea typeface="Arial" pitchFamily="34" charset="-122"/>
                 <a:cs typeface="Arial" pitchFamily="34" charset="-120"/>
               </a:rPr>
-              <a:t>SKILL.md 示例</a:t>
+              <a:t>加载优先级</a:t>
             </a:r>
             <a:endParaRPr lang="en-US" sz="1400" dirty="0"/>
           </a:p>
@@ -4376,8 +4833,8 @@
         </p:nvSpPr>
         <p:spPr>
           <a:xfrm>
-            <a:off x="5029200" y="1600200"/>
-            <a:ext cx="3474720" cy="1920240"/>
+            <a:off x="4937760" y="1691640"/>
+            <a:ext cx="3657600" cy="1371600"/>
           </a:xfrm>
           <a:prstGeom prst="rect">
             <a:avLst/>
@@ -4393,255 +4850,49 @@
               <a:buNone/>
             </a:pPr>
             <a:r>
-              <a:rPr lang="en-US" sz="900" dirty="0">
+              <a:rPr lang="en-US" sz="1300" dirty="0">
                 <a:solidFill>
                   <a:srgbClr val="2D3748"/>
                 </a:solidFill>
-                <a:latin typeface="Consolas" pitchFamily="34" charset="0"/>
-                <a:ea typeface="Consolas" pitchFamily="34" charset="-122"/>
-                <a:cs typeface="Consolas" pitchFamily="34" charset="-120"/>
-              </a:rPr>
-              <a:t>---</a:t>
-            </a:r>
-            <a:endParaRPr lang="en-US" sz="900" dirty="0"/>
-          </a:p>
-          <a:p>
-            <a:pPr indent="0" marL="0">
-              <a:buNone/>
-            </a:pPr>
-            <a:r>
-              <a:rPr lang="en-US" sz="900" dirty="0">
+                <a:latin typeface="Arial" pitchFamily="34" charset="0"/>
+                <a:ea typeface="Arial" pitchFamily="34" charset="-122"/>
+                <a:cs typeface="Arial" pitchFamily="34" charset="-120"/>
+              </a:rPr>
+              <a:t>🥇 Workspace（当前）</a:t>
+            </a:r>
+            <a:endParaRPr lang="en-US" sz="1300" dirty="0"/>
+          </a:p>
+          <a:p>
+            <a:pPr indent="0" marL="0">
+              <a:buNone/>
+            </a:pPr>
+            <a:r>
+              <a:rPr lang="en-US" sz="1300" dirty="0">
                 <a:solidFill>
                   <a:srgbClr val="2D3748"/>
                 </a:solidFill>
-                <a:latin typeface="Consolas" pitchFamily="34" charset="0"/>
-                <a:ea typeface="Consolas" pitchFamily="34" charset="-122"/>
-                <a:cs typeface="Consolas" pitchFamily="34" charset="-120"/>
-              </a:rPr>
-              <a:t>name: 周报生成器</a:t>
-            </a:r>
-            <a:endParaRPr lang="en-US" sz="900" dirty="0"/>
-          </a:p>
-          <a:p>
-            <a:pPr indent="0" marL="0">
-              <a:buNone/>
-            </a:pPr>
-            <a:r>
-              <a:rPr lang="en-US" sz="900" dirty="0">
+                <a:latin typeface="Arial" pitchFamily="34" charset="0"/>
+                <a:ea typeface="Arial" pitchFamily="34" charset="-122"/>
+                <a:cs typeface="Arial" pitchFamily="34" charset="-120"/>
+              </a:rPr>
+              <a:t>   &gt; ~/.openclaw/skills</a:t>
+            </a:r>
+            <a:endParaRPr lang="en-US" sz="1300" dirty="0"/>
+          </a:p>
+          <a:p>
+            <a:pPr indent="0" marL="0">
+              <a:buNone/>
+            </a:pPr>
+            <a:r>
+              <a:rPr lang="en-US" sz="1300" dirty="0">
                 <a:solidFill>
                   <a:srgbClr val="2D3748"/>
                 </a:solidFill>
-                <a:latin typeface="Consolas" pitchFamily="34" charset="0"/>
-                <a:ea typeface="Consolas" pitchFamily="34" charset="-122"/>
-                <a:cs typeface="Consolas" pitchFamily="34" charset="-120"/>
-              </a:rPr>
-              <a:t>description: "每周一自动生成周报"</a:t>
-            </a:r>
-            <a:endParaRPr lang="en-US" sz="900" dirty="0"/>
-          </a:p>
-          <a:p>
-            <a:pPr indent="0" marL="0">
-              <a:buNone/>
-            </a:pPr>
-            <a:r>
-              <a:rPr lang="en-US" sz="900" dirty="0">
-                <a:solidFill>
-                  <a:srgbClr val="2D3748"/>
-                </a:solidFill>
-                <a:latin typeface="Consolas" pitchFamily="34" charset="0"/>
-                <a:ea typeface="Consolas" pitchFamily="34" charset="-122"/>
-                <a:cs typeface="Consolas" pitchFamily="34" charset="-120"/>
-              </a:rPr>
-              <a:t>---</a:t>
-            </a:r>
-            <a:endParaRPr lang="en-US" sz="900" dirty="0"/>
-          </a:p>
-          <a:p>
-            <a:pPr indent="0" marL="0">
-              <a:buNone/>
-            </a:pPr>
-            <a:endParaRPr lang="en-US" sz="900" dirty="0"/>
-          </a:p>
-          <a:p>
-            <a:pPr indent="0" marL="0">
-              <a:buNone/>
-            </a:pPr>
-            <a:r>
-              <a:rPr lang="en-US" sz="900" dirty="0">
-                <a:solidFill>
-                  <a:srgbClr val="2D3748"/>
-                </a:solidFill>
-                <a:latin typeface="Consolas" pitchFamily="34" charset="0"/>
-                <a:ea typeface="Consolas" pitchFamily="34" charset="-122"/>
-                <a:cs typeface="Consolas" pitchFamily="34" charset="-120"/>
-              </a:rPr>
-              <a:t># 什么时候用？</a:t>
-            </a:r>
-            <a:endParaRPr lang="en-US" sz="900" dirty="0"/>
-          </a:p>
-          <a:p>
-            <a:pPr indent="0" marL="0">
-              <a:buNone/>
-            </a:pPr>
-            <a:r>
-              <a:rPr lang="en-US" sz="900" dirty="0">
-                <a:solidFill>
-                  <a:srgbClr val="2D3748"/>
-                </a:solidFill>
-                <a:latin typeface="Consolas" pitchFamily="34" charset="0"/>
-                <a:ea typeface="Consolas" pitchFamily="34" charset="-122"/>
-                <a:cs typeface="Consolas" pitchFamily="34" charset="-120"/>
-              </a:rPr>
-              <a:t>- 每周一需要写周报</a:t>
-            </a:r>
-            <a:endParaRPr lang="en-US" sz="900" dirty="0"/>
-          </a:p>
-          <a:p>
-            <a:pPr indent="0" marL="0">
-              <a:buNone/>
-            </a:pPr>
-            <a:endParaRPr lang="en-US" sz="900" dirty="0"/>
-          </a:p>
-          <a:p>
-            <a:pPr indent="0" marL="0">
-              <a:buNone/>
-            </a:pPr>
-            <a:r>
-              <a:rPr lang="en-US" sz="900" dirty="0">
-                <a:solidFill>
-                  <a:srgbClr val="2D3748"/>
-                </a:solidFill>
-                <a:latin typeface="Consolas" pitchFamily="34" charset="0"/>
-                <a:ea typeface="Consolas" pitchFamily="34" charset="-122"/>
-                <a:cs typeface="Consolas" pitchFamily="34" charset="-120"/>
-              </a:rPr>
-              <a:t># 怎么说？</a:t>
-            </a:r>
-            <a:endParaRPr lang="en-US" sz="900" dirty="0"/>
-          </a:p>
-          <a:p>
-            <a:pPr indent="0" marL="0">
-              <a:buNone/>
-            </a:pPr>
-            <a:r>
-              <a:rPr lang="en-US" sz="900" dirty="0">
-                <a:solidFill>
-                  <a:srgbClr val="2D3748"/>
-                </a:solidFill>
-                <a:latin typeface="Consolas" pitchFamily="34" charset="0"/>
-                <a:ea typeface="Consolas" pitchFamily="34" charset="-122"/>
-                <a:cs typeface="Consolas" pitchFamily="34" charset="-120"/>
-              </a:rPr>
-              <a:t>- "帮我写个周报"</a:t>
-            </a:r>
-            <a:endParaRPr lang="en-US" sz="900" dirty="0"/>
-          </a:p>
-        </p:txBody>
-      </p:sp>
-      <p:sp>
-        <p:nvSpPr>
-          <p:cNvPr id="9" name="Text 7"/>
-          <p:cNvSpPr/>
-          <p:nvPr/>
-        </p:nvSpPr>
-        <p:spPr>
-          <a:xfrm>
-            <a:off x="457200" y="3931920"/>
-            <a:ext cx="8229600" cy="365760"/>
-          </a:xfrm>
-          <a:prstGeom prst="rect">
-            <a:avLst/>
-          </a:prstGeom>
-          <a:noFill/>
-          <a:ln/>
-        </p:spPr>
-        <p:txBody>
-          <a:bodyPr wrap="square" rtlCol="0" anchor="ctr"/>
-          <a:lstStyle/>
-          <a:p>
-            <a:pPr indent="0" marL="0">
-              <a:buNone/>
-            </a:pPr>
-            <a:r>
-              <a:rPr lang="en-US" sz="1800" b="1" dirty="0">
-                <a:solidFill>
-                  <a:srgbClr val="065A82"/>
-                </a:solidFill>
-                <a:latin typeface="Arial" pitchFamily="34" charset="0"/>
-                <a:ea typeface="Arial" pitchFamily="34" charset="-122"/>
-                <a:cs typeface="Arial" pitchFamily="34" charset="-120"/>
-              </a:rPr>
-              <a:t>加载优先级</a:t>
-            </a:r>
-            <a:endParaRPr lang="en-US" sz="1800" dirty="0"/>
-          </a:p>
-        </p:txBody>
-      </p:sp>
-      <p:sp>
-        <p:nvSpPr>
-          <p:cNvPr id="10" name="Text 8"/>
-          <p:cNvSpPr/>
-          <p:nvPr/>
-        </p:nvSpPr>
-        <p:spPr>
-          <a:xfrm>
-            <a:off x="457200" y="4343400"/>
-            <a:ext cx="8229600" cy="640080"/>
-          </a:xfrm>
-          <a:prstGeom prst="rect">
-            <a:avLst/>
-          </a:prstGeom>
-          <a:noFill/>
-          <a:ln/>
-        </p:spPr>
-        <p:txBody>
-          <a:bodyPr wrap="square" rtlCol="0" anchor="ctr"/>
-          <a:lstStyle/>
-          <a:p>
-            <a:pPr indent="0" marL="0">
-              <a:buNone/>
-            </a:pPr>
-            <a:r>
-              <a:rPr lang="en-US" sz="1300" b="1" dirty="0">
-                <a:solidFill>
-                  <a:srgbClr val="2D3748"/>
-                </a:solidFill>
-                <a:latin typeface="Arial" pitchFamily="34" charset="0"/>
-                <a:ea typeface="Arial" pitchFamily="34" charset="-122"/>
-                <a:cs typeface="Arial" pitchFamily="34" charset="-120"/>
-              </a:rPr>
-              <a:t>🥇 Workspace（当前）</a:t>
-            </a:r>
-            <a:pPr indent="0" marL="0">
-              <a:buNone/>
-            </a:pPr>
-            <a:r>
-              <a:rPr lang="en-US" sz="1300" dirty="0">
-                <a:solidFill>
-                  <a:srgbClr val="2D3748"/>
-                </a:solidFill>
-                <a:latin typeface="Arial" pitchFamily="34" charset="0"/>
-                <a:ea typeface="Arial" pitchFamily="34" charset="-122"/>
-                <a:cs typeface="Arial" pitchFamily="34" charset="-120"/>
-              </a:rPr>
-              <a:t> &gt; ~/.openclaw/skills</a:t>
-            </a:r>
-            <a:endParaRPr lang="en-US" sz="1300" dirty="0"/>
-          </a:p>
-          <a:p>
-            <a:pPr indent="0" marL="0">
-              <a:buNone/>
-            </a:pPr>
-            <a:r>
-              <a:rPr lang="en-US" sz="1300" dirty="0">
-                <a:solidFill>
-                  <a:srgbClr val="2D3748"/>
-                </a:solidFill>
-                <a:latin typeface="Arial" pitchFamily="34" charset="0"/>
-                <a:ea typeface="Arial" pitchFamily="34" charset="-122"/>
-                <a:cs typeface="Arial" pitchFamily="34" charset="-120"/>
-              </a:rPr>
-              <a:t> &gt; 系统内置</a:t>
+                <a:latin typeface="Arial" pitchFamily="34" charset="0"/>
+                <a:ea typeface="Arial" pitchFamily="34" charset="-122"/>
+                <a:cs typeface="Arial" pitchFamily="34" charset="-120"/>
+              </a:rPr>
+              <a:t>   &gt; 系统内置</a:t>
             </a:r>
             <a:endParaRPr lang="en-US" sz="1300" dirty="0"/>
           </a:p>
@@ -5430,7 +5681,7 @@
                 <a:ea typeface="Arial" pitchFamily="34" charset="-122"/>
                 <a:cs typeface="Arial" pitchFamily="34" charset="-120"/>
               </a:rPr>
-              <a:t>"帮我查下北京天气"</a:t>
+              <a:t>"帮我查下天气"</a:t>
             </a:r>
             <a:endParaRPr lang="en-US" sz="1100" dirty="0"/>
           </a:p>
@@ -5677,7 +5928,7 @@
                 <a:ea typeface="Arial" pitchFamily="34" charset="-122"/>
                 <a:cs typeface="Arial" pitchFamily="34" charset="-120"/>
               </a:rPr>
-              <a:t>写下你工作中</a:t>
+              <a:t>写下最重复的3件事</a:t>
             </a:r>
             <a:endParaRPr lang="en-US" sz="1100" dirty="0"/>
           </a:p>
@@ -5685,6 +5936,12 @@
             <a:pPr algn="ctr" indent="0" marL="0">
               <a:buNone/>
             </a:pPr>
+            <a:endParaRPr lang="en-US" sz="1100" dirty="0"/>
+          </a:p>
+          <a:p>
+            <a:pPr algn="ctr" indent="0" marL="0">
+              <a:buNone/>
+            </a:pPr>
             <a:r>
               <a:rPr lang="en-US" sz="1100" dirty="0">
                 <a:solidFill>
@@ -5694,30 +5951,7 @@
                 <a:ea typeface="Arial" pitchFamily="34" charset="-122"/>
                 <a:cs typeface="Arial" pitchFamily="34" charset="-120"/>
               </a:rPr>
-              <a:t>最重复的 3 件事</a:t>
-            </a:r>
-            <a:endParaRPr lang="en-US" sz="1100" dirty="0"/>
-          </a:p>
-          <a:p>
-            <a:pPr algn="ctr" indent="0" marL="0">
-              <a:buNone/>
-            </a:pPr>
-            <a:endParaRPr lang="en-US" sz="1100" dirty="0"/>
-          </a:p>
-          <a:p>
-            <a:pPr algn="ctr" indent="0" marL="0">
-              <a:buNone/>
-            </a:pPr>
-            <a:r>
-              <a:rPr lang="en-US" sz="1100" dirty="0">
-                <a:solidFill>
-                  <a:srgbClr val="FFFFFF"/>
-                </a:solidFill>
-                <a:latin typeface="Arial" pitchFamily="34" charset="0"/>
-                <a:ea typeface="Arial" pitchFamily="34" charset="-122"/>
-                <a:cs typeface="Arial" pitchFamily="34" charset="-120"/>
-              </a:rPr>
-              <a:t>想想能否用 Skill 自动化</a:t>
+              <a:t>能否用 Skill 自动化？</a:t>
             </a:r>
             <a:endParaRPr lang="en-US" sz="1100" dirty="0"/>
           </a:p>
